--- a/ppt/IoTAI11-TensorFlow.pptx
+++ b/ppt/IoTAI11-TensorFlow.pptx
@@ -3685,9 +3685,48 @@
       </p:grpSpPr>
       <p:sp>
         <p:nvSpPr>
-          <p:cNvPr id="2050" name="Rectangle 5"/>
+          <p:cNvPr id="3" name="ZoneTexte 2"/>
+          <p:cNvSpPr txBox="1"/>
+          <p:nvPr/>
+        </p:nvSpPr>
+        <p:spPr>
+          <a:xfrm>
+            <a:off x="3107495" y="2132856"/>
+            <a:ext cx="3211135" cy="646331"/>
+          </a:xfrm>
+          <a:prstGeom prst="rect">
+            <a:avLst/>
+          </a:prstGeom>
+          <a:noFill/>
+        </p:spPr>
+        <p:txBody>
+          <a:bodyPr wrap="none" rtlCol="0">
+            <a:spAutoFit/>
+          </a:bodyPr>
+          <a:lstStyle/>
+          <a:p>
+            <a:r>
+              <a:rPr lang="fr-FR" sz="3600" dirty="0" err="1"/>
+              <a:t>Deep</a:t>
+            </a:r>
+            <a:r>
+              <a:rPr lang="fr-FR" sz="3600" dirty="0"/>
+              <a:t> Learning</a:t>
+            </a:r>
+          </a:p>
+        </p:txBody>
+      </p:sp>
+      <p:sp>
+        <p:nvSpPr>
+          <p:cNvPr id="4" name="Sous-titre 3">
+            <a:extLst>
+              <a:ext uri="{FF2B5EF4-FFF2-40B4-BE49-F238E27FC236}">
+                <a16:creationId xmlns:a16="http://schemas.microsoft.com/office/drawing/2014/main" id="{064A7E8C-15F4-61F7-2B29-D562CB325CC1}"/>
+              </a:ext>
+            </a:extLst>
+          </p:cNvPr>
           <p:cNvSpPr>
-            <a:spLocks noGrp="1" noChangeArrowheads="1"/>
+            <a:spLocks noGrp="1"/>
           </p:cNvSpPr>
           <p:nvPr>
             <p:ph type="subTitle" idx="1"/>
@@ -3698,18 +3737,19 @@
           <a:bodyPr/>
           <a:lstStyle/>
           <a:p>
-            <a:pPr eaLnBrk="1" hangingPunct="1"/>
-            <a:r>
-              <a:rPr lang="fr-FR" altLang="fr-FR" dirty="0" err="1"/>
-              <a:t>TensorFlow</a:t>
-            </a:r>
-            <a:endParaRPr lang="fr-FR" altLang="fr-FR" dirty="0"/>
+            <a:endParaRPr lang="fr-FR"/>
           </a:p>
         </p:txBody>
       </p:sp>
       <p:pic>
         <p:nvPicPr>
-          <p:cNvPr id="2" name="Image 1"/>
+          <p:cNvPr id="6" name="Image 5">
+            <a:extLst>
+              <a:ext uri="{FF2B5EF4-FFF2-40B4-BE49-F238E27FC236}">
+                <a16:creationId xmlns:a16="http://schemas.microsoft.com/office/drawing/2014/main" id="{B9D8472D-5B6A-2686-274F-C3CA58D00066}"/>
+              </a:ext>
+            </a:extLst>
+          </p:cNvPr>
           <p:cNvPicPr>
             <a:picLocks noChangeAspect="1"/>
           </p:cNvPicPr>
@@ -3723,47 +3763,14 @@
         </p:blipFill>
         <p:spPr>
           <a:xfrm>
-            <a:off x="1214437" y="5023445"/>
-            <a:ext cx="6715125" cy="1285875"/>
+            <a:off x="2626796" y="3530885"/>
+            <a:ext cx="4172532" cy="1209844"/>
           </a:xfrm>
           <a:prstGeom prst="rect">
             <a:avLst/>
           </a:prstGeom>
         </p:spPr>
       </p:pic>
-      <p:sp>
-        <p:nvSpPr>
-          <p:cNvPr id="3" name="ZoneTexte 2"/>
-          <p:cNvSpPr txBox="1"/>
-          <p:nvPr/>
-        </p:nvSpPr>
-        <p:spPr>
-          <a:xfrm>
-            <a:off x="3107495" y="2132856"/>
-            <a:ext cx="3211135" cy="646331"/>
-          </a:xfrm>
-          <a:prstGeom prst="rect">
-            <a:avLst/>
-          </a:prstGeom>
-          <a:noFill/>
-        </p:spPr>
-        <p:txBody>
-          <a:bodyPr wrap="none" rtlCol="0">
-            <a:spAutoFit/>
-          </a:bodyPr>
-          <a:lstStyle/>
-          <a:p>
-            <a:r>
-              <a:rPr lang="fr-FR" sz="3600" dirty="0" err="1"/>
-              <a:t>Deep</a:t>
-            </a:r>
-            <a:r>
-              <a:rPr lang="fr-FR" sz="3600" dirty="0"/>
-              <a:t> Learning</a:t>
-            </a:r>
-          </a:p>
-        </p:txBody>
-      </p:sp>
     </p:spTree>
   </p:cSld>
   <p:clrMapOvr>
